--- a/metro/metro-f06-testimonial.pptx
+++ b/metro/metro-f06-testimonial.pptx
@@ -3558,9 +3558,9 @@
                 <a:solidFill>
                   <a:srgbClr val="FFFFFF"/>
                 </a:solidFill>
-                <a:latin typeface="Space Grotesk"/>
-                <a:ea typeface="Space Grotesk"/>
-                <a:cs typeface="Space Grotesk"/>
+                <a:latin typeface="HK Grotesk"/>
+                <a:ea typeface="HK Grotesk"/>
+                <a:cs typeface="HK Grotesk"/>
               </a:rPr>
               <a:t>NO</a:t>
             </a:r>
@@ -3597,9 +3597,9 @@
                 <a:solidFill>
                   <a:srgbClr val="FFFFFF"/>
                 </a:solidFill>
-                <a:latin typeface="Space Grotesk"/>
-                <a:ea typeface="Space Grotesk"/>
-                <a:cs typeface="Space Grotesk"/>
+                <a:latin typeface="HK Grotesk"/>
+                <a:ea typeface="HK Grotesk"/>
+                <a:cs typeface="HK Grotesk"/>
               </a:rPr>
               <a:t>North &amp; Oak</a:t>
             </a:r>
@@ -3702,9 +3702,9 @@
                 <a:solidFill>
                   <a:srgbClr val="2D5BE3"/>
                 </a:solidFill>
-                <a:latin typeface="Space Grotesk"/>
-                <a:ea typeface="Space Grotesk"/>
-                <a:cs typeface="Space Grotesk"/>
+                <a:latin typeface="HK Grotesk"/>
+                <a:ea typeface="HK Grotesk"/>
+                <a:cs typeface="HK Grotesk"/>
               </a:rPr>
               <a:t>◆ ◆ ◆ ◆ ◆</a:t>
             </a:r>
@@ -3741,9 +3741,9 @@
                 <a:solidFill>
                   <a:srgbClr val="2D5BE3"/>
                 </a:solidFill>
-                <a:latin typeface="Space Grotesk"/>
-                <a:ea typeface="Space Grotesk"/>
-                <a:cs typeface="Space Grotesk"/>
+                <a:latin typeface="HK Grotesk"/>
+                <a:ea typeface="HK Grotesk"/>
+                <a:cs typeface="HK Grotesk"/>
               </a:rPr>
               <a:t>“</a:t>
             </a:r>
@@ -3780,9 +3780,9 @@
                 <a:solidFill>
                   <a:srgbClr val="FFFFFF"/>
                 </a:solidFill>
-                <a:latin typeface="Space Grotesk"/>
-                <a:ea typeface="Space Grotesk"/>
-                <a:cs typeface="Space Grotesk"/>
+                <a:latin typeface="HK Grotesk"/>
+                <a:ea typeface="HK Grotesk"/>
+                <a:cs typeface="HK Grotesk"/>
               </a:rPr>
               <a:t>Julian found us the loft we’d been picturing for two years — and closed it in under three weeks.</a:t>
             </a:r>
@@ -3815,9 +3815,9 @@
                 <a:solidFill>
                   <a:srgbClr val="FFFFFF"/>
                 </a:solidFill>
-                <a:latin typeface="Space Grotesk"/>
-                <a:ea typeface="Space Grotesk"/>
-                <a:cs typeface="Space Grotesk"/>
+                <a:latin typeface="HK Grotesk"/>
+                <a:ea typeface="HK Grotesk"/>
+                <a:cs typeface="HK Grotesk"/>
               </a:rPr>
               <a:t>Maya &amp; Devin R.</a:t>
             </a:r>
